--- a/powerpoint/Presentasjon_Oppvekst_Bemanningskontroll_2026.pptx
+++ b/powerpoint/Presentasjon_Oppvekst_Bemanningskontroll_2026.pptx
@@ -3214,7 +3214,7 @@
               </a:defRPr>
             </a:pPr>
             <a:r>
-              <a:t>Dato: 14.10.2026  •  Kristin E. Bakke, Kommunalsjef  /  Frank Ellingsen, Senior Controller</a:t>
+              <a:t>Dato: 17.10.2026  •  Kristin E. Bakke, Kommunalsjef  /  Frank Ellingsen, Senior Controller</a:t>
             </a:r>
           </a:p>
           <a:p>
@@ -3229,7 +3229,7 @@
               </a:defRPr>
             </a:pPr>
             <a:r>
-              <a:t>Audit Stempel: 510e3be5a6892653d900f6d2...  |  Møte med Grunnskolerektorene</a:t>
+              <a:t>Audit Stempel: e2a8eec06bdafd2fbbafa879...  |  Møte med Grunnskolerektorene</a:t>
             </a:r>
           </a:p>
         </p:txBody>
@@ -3379,7 +3379,7 @@
               </a:defRPr>
             </a:pPr>
             <a:r>
-              <a:t>YTD MERFORBRUK SKOLER</a:t>
+              <a:t>YTD AVVIK SKOLER</a:t>
             </a:r>
           </a:p>
           <a:p>
@@ -3394,7 +3394,7 @@
               </a:defRPr>
             </a:pPr>
             <a:r>
-              <a:t>+1 420 000 kr</a:t>
+              <a:t>-1 420 000 kr</a:t>
             </a:r>
           </a:p>
           <a:p>
@@ -3409,7 +3409,7 @@
               </a:defRPr>
             </a:pPr>
             <a:r>
-              <a:t>Grim og Vågsbygd driver 61 % av avviket</a:t>
+              <a:t>Grim og Vågsbygd driver 61 % av merforbruket</a:t>
             </a:r>
           </a:p>
         </p:txBody>
@@ -3614,7 +3614,7 @@
               </a:defRPr>
             </a:pPr>
             <a:r>
-              <a:t>-680 000 kr</a:t>
+              <a:t>+680 000 kr</a:t>
             </a:r>
           </a:p>
           <a:p>
@@ -3746,7 +3746,7 @@
               </a:defRPr>
             </a:pPr>
             <a:r>
-              <a:t>Kristiansand kommune | Økonomi &amp; Virksomhetsstyring  •  Audit ID: 510e3be5a689  •  Side 2 av 7</a:t>
+              <a:t>Kristiansand kommune | Økonomi &amp; Virksomhetsstyring  •  Audit ID: e2a8eec06bda  •  Side 2 av 7</a:t>
             </a:r>
           </a:p>
         </p:txBody>
@@ -3952,7 +3952,7 @@
                         </a:defRPr>
                       </a:pPr>
                       <a:r>
-                        <a:t>Avvik YTD (Merforbruk)</a:t>
+                        <a:t>Avvik YTD</a:t>
                       </a:r>
                     </a:p>
                   </a:txBody>
@@ -4053,7 +4053,7 @@
                         </a:defRPr>
                       </a:pPr>
                       <a:r>
-                        <a:t>+570 000 kr</a:t>
+                        <a:t>-570 000 kr</a:t>
                       </a:r>
                     </a:p>
                   </a:txBody>
@@ -4154,7 +4154,7 @@
                         </a:defRPr>
                       </a:pPr>
                       <a:r>
-                        <a:t>+310 000 kr</a:t>
+                        <a:t>-310 000 kr</a:t>
                       </a:r>
                     </a:p>
                   </a:txBody>
@@ -4255,7 +4255,7 @@
                         </a:defRPr>
                       </a:pPr>
                       <a:r>
-                        <a:t>+240 000 kr</a:t>
+                        <a:t>-240 000 kr</a:t>
                       </a:r>
                     </a:p>
                   </a:txBody>
@@ -4356,7 +4356,7 @@
                         </a:defRPr>
                       </a:pPr>
                       <a:r>
-                        <a:t>+300 000 kr</a:t>
+                        <a:t>-300 000 kr</a:t>
                       </a:r>
                     </a:p>
                   </a:txBody>
@@ -4402,7 +4402,7 @@
               </a:defRPr>
             </a:pPr>
             <a:r>
-              <a:t>Kristiansand kommune | Økonomi &amp; Virksomhetsstyring  •  Audit ID: 510e3be5a689  •  Side 3 av 7</a:t>
+              <a:t>Kristiansand kommune | Økonomi &amp; Virksomhetsstyring  •  Audit ID: e2a8eec06bda  •  Side 3 av 7</a:t>
             </a:r>
           </a:p>
         </p:txBody>
@@ -4948,7 +4948,7 @@
               </a:defRPr>
             </a:pPr>
             <a:r>
-              <a:t>Kristiansand kommune | Økonomi &amp; Virksomhetsstyring  •  Audit ID: 510e3be5a689  •  Side 4 av 7</a:t>
+              <a:t>Kristiansand kommune | Økonomi &amp; Virksomhetsstyring  •  Audit ID: e2a8eec06bda  •  Side 4 av 7</a:t>
             </a:r>
           </a:p>
         </p:txBody>
@@ -5465,7 +5465,7 @@
               </a:defRPr>
             </a:pPr>
             <a:r>
-              <a:t>Kristiansand kommune | Økonomi &amp; Virksomhetsstyring  •  Audit ID: 510e3be5a689  •  Side 5 av 7</a:t>
+              <a:t>Kristiansand kommune | Økonomi &amp; Virksomhetsstyring  •  Audit ID: e2a8eec06bda  •  Side 5 av 7</a:t>
             </a:r>
           </a:p>
         </p:txBody>
@@ -5856,7 +5856,7 @@
               </a:defRPr>
             </a:pPr>
             <a:r>
-              <a:t>Kristiansand kommune | Økonomi &amp; Virksomhetsstyring  •  Audit ID: 510e3be5a689  •  Side 6 av 7</a:t>
+              <a:t>Kristiansand kommune | Økonomi &amp; Virksomhetsstyring  •  Audit ID: e2a8eec06bda  •  Side 6 av 7</a:t>
             </a:r>
           </a:p>
         </p:txBody>
@@ -6055,7 +6055,7 @@
               </a:defRPr>
             </a:pPr>
             <a:r>
-              <a:t>Kristiansand, 14.10.2026  •  Kristin E. Bakke, Kommunalsjef  /  Frank Ellingsen, Senior Controller</a:t>
+              <a:t>Kristiansand, 17.10.2026  •  Kristin E. Bakke, Kommunalsjef  /  Frank Ellingsen, Senior Controller</a:t>
             </a:r>
           </a:p>
         </p:txBody>
@@ -6091,7 +6091,7 @@
               </a:defRPr>
             </a:pPr>
             <a:r>
-              <a:t>Kristiansand kommune | Økonomi &amp; Virksomhetsstyring  •  Audit ID: 510e3be5a689  •  Side 7 av 7</a:t>
+              <a:t>Kristiansand kommune | Økonomi &amp; Virksomhetsstyring  •  Audit ID: e2a8eec06bda  •  Side 7 av 7</a:t>
             </a:r>
           </a:p>
         </p:txBody>
